--- a/public/fun/pack/pptx/birthdaypro/돌잔치프리미엄_50_첫번째이야기중심_골든레드.pptx
+++ b/public/fun/pack/pptx/birthdaypro/돌잔치프리미엄_50_첫번째이야기중심_골든레드.pptx
@@ -112,12 +112,12 @@
   <p:extLst>
     <p:ext uri="{521415D9-36F7-43E2-AB2F-B90AF26B5E84}">
       <p14:sectionLst xmlns:p14="http://schemas.microsoft.com/office/powerpoint/2010/main">
-        <p14:section name="시작" id="{5F3FF2D5-A54E-497C-AECF-D07930C36D84}">
+        <p14:section name="시작" id="{5A8E8A1C-264D-4F39-BC6C-4BCA61731DA4}">
           <p14:sldIdLst>
             <p14:sldId id="256"/>
           </p14:sldIdLst>
         </p14:section>
-        <p14:section name="본문" id="{CE91BCBB-2A7F-4712-B6A1-F406D7884EAA}">
+        <p14:section name="본문" id="{5796B70C-6BE9-4A39-9878-06C9D69EED0F}">
           <p14:sldIdLst>
             <p14:sldId id="257"/>
             <p14:sldId id="258"/>
@@ -125,7 +125,7 @@
             <p14:sldId id="260"/>
           </p14:sldIdLst>
         </p14:section>
-        <p14:section name="마무리" id="{5AC8CEEA-5A1E-4AF8-AE50-1925F380F2BF}">
+        <p14:section name="마무리" id="{EBDC0315-3D0E-45B9-B621-3D25DB22B295}">
           <p14:sldIdLst>
             <p14:sldId id="261"/>
           </p14:sldIdLst>
@@ -1583,7 +1583,7 @@
             </a:lvl1pPr>
           </a:lstStyle>
           <a:p>
-            <a:fld id="{4CC743A6-AB53-4CAF-8BCF-1CBE2E2447C0}" type="slidenum">
+            <a:fld id="{CDD47B48-9980-4CDF-99A6-68315B02850C}" type="slidenum">
               <a:rPr lang="en-US"/>
               <a:t>‹#›</a:t>
             </a:fld>
@@ -2388,7 +2388,7 @@
             </a:lvl1pPr>
           </a:lstStyle>
           <a:p>
-            <a:fld id="{0C2A7A97-1151-40D5-97CF-042159B4ABD5}" type="slidenum">
+            <a:fld id="{1A1FB499-AA9C-4AD9-B7E9-66A02136A28E}" type="slidenum">
               <a:rPr lang="en-US"/>
               <a:t>‹#›</a:t>
             </a:fld>
@@ -3077,7 +3077,7 @@
             </a:lvl1pPr>
           </a:lstStyle>
           <a:p>
-            <a:fld id="{712A1BB5-3ADF-4B55-9EC9-F1DD6E257FD9}" type="slidenum">
+            <a:fld id="{B14C8EBB-B8E6-400C-8F32-79CFC74F2F5F}" type="slidenum">
               <a:rPr lang="en-US"/>
               <a:t>‹#›</a:t>
             </a:fld>
@@ -3900,7 +3900,7 @@
           <a:p>
             <a:r>
               <a:rPr lang="ko-KR"/>
-              <a:t>일 년 전 오늘 태어났습니다</a:t>
+              <a:t>그날 처음 만났습니다</a:t>
             </a:r>
           </a:p>
         </p:txBody>
@@ -3922,7 +3922,7 @@
           <a:p>
             <a:r>
               <a:rPr lang="ko-KR"/>
-              <a:t>아기 이름 · 0000. 00. 00</a:t>
+              <a:t>아기 이름 · 날짜 입력</a:t>
             </a:r>
           </a:p>
           <a:p>
@@ -4082,7 +4082,7 @@
           <a:bodyPr/>
           <a:lstStyle/>
           <a:p>
-            <a:fld id="{A4533DB8-F40A-487D-8221-26911B04D1C6}" type="slidenum">
+            <a:fld id="{4994F4CB-5DDA-48E6-90C2-7A8CD845AE9F}" type="slidenum">
               <a:rPr lang="en-US"/>
               <a:t>‹#›</a:t>
             </a:fld>
@@ -4682,7 +4682,7 @@
           <a:bodyPr/>
           <a:lstStyle/>
           <a:p>
-            <a:fld id="{B7BBDBB4-0307-4FE8-B594-FC41F3B8A60A}" type="slidenum">
+            <a:fld id="{99DE5851-055D-4F62-A4B0-D7F564F983A0}" type="slidenum">
               <a:rPr lang="en-US"/>
               <a:t>‹#›</a:t>
             </a:fld>
@@ -5524,7 +5524,7 @@
           <a:bodyPr/>
           <a:lstStyle/>
           <a:p>
-            <a:fld id="{B0F0FB67-31B9-47A4-8AE4-993A852091CD}" type="slidenum">
+            <a:fld id="{37A23B0E-AC34-4F70-A398-BF69E7690EE2}" type="slidenum">
               <a:rPr lang="en-US"/>
               <a:t>‹#›</a:t>
             </a:fld>
@@ -7310,7 +7310,7 @@
           <a:bodyPr/>
           <a:lstStyle/>
           <a:p>
-            <a:fld id="{3CE9D6BA-1E67-43D2-821E-4E0CA52107F9}" type="slidenum">
+            <a:fld id="{C0CFB0D1-5EA9-43F0-92AD-D933FB7CD356}" type="slidenum">
               <a:rPr lang="en-US"/>
               <a:t>‹#›</a:t>
             </a:fld>
